--- a/python/CourseDesign/Week05e/Week5_Lecture10_Linear_Phase_Generalized_Phase_ML.pptx
+++ b/python/CourseDesign/Week05e/Week5_Lecture10_Linear_Phase_Generalized_Phase_ML.pptx
@@ -6305,144 +6305,73 @@
           <a:chExt cx="0" cy="0"/>
         </a:xfrm>
       </p:grpSpPr>
-      <mc:AlternateContent xmlns:mc="http://schemas.openxmlformats.org/markup-compatibility/2006">
-        <mc:Choice xmlns:a14="http://schemas.microsoft.com/office/drawing/2010/main" Requires="a14">
-          <p:sp>
-            <p:nvSpPr>
-              <p:cNvPr id="8" name="Text 0"/>
-              <p:cNvSpPr/>
-              <p:nvPr/>
-            </p:nvSpPr>
-            <p:spPr>
-              <a:xfrm>
-                <a:off x="594360" y="502920"/>
-                <a:ext cx="2285640" cy="319680"/>
-              </a:xfrm>
-              <a:prstGeom prst="rect">
-                <a:avLst/>
-              </a:prstGeom>
-              <a:noFill/>
-              <a:ln w="0">
-                <a:noFill/>
-              </a:ln>
-            </p:spPr>
-            <p:style>
-              <a:lnRef idx="0">
-                <a:scrgbClr r="0" g="0" b="0"/>
-              </a:lnRef>
-              <a:fillRef idx="0">
-                <a:scrgbClr r="0" g="0" b="0"/>
-              </a:fillRef>
-              <a:effectRef idx="0">
-                <a:scrgbClr r="0" g="0" b="0"/>
-              </a:effectRef>
-              <a:fontRef idx="minor"/>
-            </p:style>
-            <p:txBody>
-              <a:bodyPr lIns="0" tIns="0" rIns="0" bIns="0" anchor="ctr">
-                <a:noAutofit/>
-              </a:bodyPr>
-              <a:lstStyle/>
-              <a:p>
-                <a:pPr defTabSz="914400">
-                  <a:lnSpc>
-                    <a:spcPct val="100000"/>
-                  </a:lnSpc>
-                  <a:tabLst>
-                    <a:tab pos="0" algn="l"/>
-                  </a:tabLst>
-                </a:pPr>
-                <a:r>
-                  <a:rPr lang="en-US" sz="1500" b="1" u="none" strike="noStrike" dirty="0">
-                    <a:solidFill>
-                      <a:srgbClr val="A7C7E7"/>
-                    </a:solidFill>
-                    <a:effectLst/>
-                    <a:uFillTx/>
-                    <a:latin typeface="Aptos"/>
-                  </a:rPr>
-                  <a:t>WEEK 5 </a:t>
-                </a:r>
-                <a14:m>
-                  <m:oMath xmlns:m="http://schemas.openxmlformats.org/officeDocument/2006/math">
-                    <m:r>
-                      <a:rPr lang="en-US" sz="1500" b="1" i="1" u="none" strike="noStrike" smtClean="0">
-                        <a:solidFill>
-                          <a:srgbClr val="A7C7E7"/>
-                        </a:solidFill>
-                        <a:effectLst/>
-                        <a:uFillTx/>
-                        <a:latin typeface="Cambria Math" panose="02040503050406030204" pitchFamily="18" charset="0"/>
-                      </a:rPr>
-                      <m:t>●</m:t>
-                    </m:r>
-                  </m:oMath>
-                </a14:m>
-                <a:r>
-                  <a:rPr lang="en-US" sz="1500" b="1" u="none" strike="noStrike" dirty="0">
-                    <a:solidFill>
-                      <a:srgbClr val="A7C7E7"/>
-                    </a:solidFill>
-                    <a:effectLst/>
-                    <a:uFillTx/>
-                    <a:latin typeface="Aptos"/>
-                  </a:rPr>
-                  <a:t> LECTURE 10</a:t>
-                </a:r>
-                <a:endParaRPr lang="en-US" sz="1500" b="0" u="none" strike="noStrike" dirty="0">
-                  <a:solidFill>
-                    <a:srgbClr val="FFFFFF"/>
-                  </a:solidFill>
-                  <a:effectLst/>
-                  <a:uFillTx/>
-                  <a:latin typeface="Arial"/>
-                </a:endParaRPr>
-              </a:p>
-            </p:txBody>
-          </p:sp>
-        </mc:Choice>
-        <mc:Fallback>
-          <p:sp>
-            <p:nvSpPr>
-              <p:cNvPr id="8" name="Text 0"/>
-              <p:cNvSpPr>
-                <a:spLocks noRot="1" noChangeAspect="1" noMove="1" noResize="1" noEditPoints="1" noAdjustHandles="1" noChangeArrowheads="1" noChangeShapeType="1" noTextEdit="1"/>
-              </p:cNvSpPr>
-              <p:nvPr/>
-            </p:nvSpPr>
-            <p:spPr>
-              <a:xfrm>
-                <a:off x="594360" y="502920"/>
-                <a:ext cx="2285640" cy="319680"/>
-              </a:xfrm>
-              <a:prstGeom prst="rect">
-                <a:avLst/>
-              </a:prstGeom>
-              <a:blipFill>
-                <a:blip r:embed="rId3"/>
-                <a:stretch>
-                  <a:fillRect l="-5080" t="-3846" b="-23077"/>
-                </a:stretch>
-              </a:blipFill>
-              <a:ln w="0">
-                <a:noFill/>
-              </a:ln>
-            </p:spPr>
-            <p:txBody>
-              <a:bodyPr/>
-              <a:lstStyle/>
-              <a:p>
-                <a:r>
-                  <a:rPr lang="en-US">
-                    <a:noFill/>
-                  </a:rPr>
-                  <a:t> </a:t>
-                </a:r>
-              </a:p>
-            </p:txBody>
-          </p:sp>
-        </mc:Fallback>
-      </mc:AlternateContent>
+      <p:sp>
+        <p:nvSpPr>
+          <p:cNvPr id="8" name="Text 0"/>
+          <p:cNvSpPr/>
+          <p:nvPr/>
+        </p:nvSpPr>
+        <p:spPr>
+          <a:xfrm>
+            <a:off x="594360" y="502920"/>
+            <a:ext cx="2285640" cy="319680"/>
+          </a:xfrm>
+          <a:prstGeom prst="rect">
+            <a:avLst/>
+          </a:prstGeom>
+          <a:noFill/>
+          <a:ln w="0">
+            <a:noFill/>
+          </a:ln>
+        </p:spPr>
+        <p:style>
+          <a:lnRef idx="0">
+            <a:scrgbClr r="0" g="0" b="0"/>
+          </a:lnRef>
+          <a:fillRef idx="0">
+            <a:scrgbClr r="0" g="0" b="0"/>
+          </a:fillRef>
+          <a:effectRef idx="0">
+            <a:scrgbClr r="0" g="0" b="0"/>
+          </a:effectRef>
+          <a:fontRef idx="minor"/>
+        </p:style>
+        <p:txBody>
+          <a:bodyPr lIns="0" tIns="0" rIns="0" bIns="0" anchor="ctr">
+            <a:noAutofit/>
+          </a:bodyPr>
+          <a:lstStyle/>
+          <a:p>
+            <a:pPr defTabSz="914400">
+              <a:lnSpc>
+                <a:spcPct val="100000"/>
+              </a:lnSpc>
+              <a:tabLst>
+                <a:tab pos="0" algn="l"/>
+              </a:tabLst>
+            </a:pPr>
+            <a:r>
+              <a:rPr lang="en-US" sz="1500" b="1" u="none" strike="noStrike" dirty="0">
+                <a:solidFill>
+                  <a:srgbClr val="A7C7E7"/>
+                </a:solidFill>
+                <a:effectLst/>
+                <a:uFillTx/>
+                <a:latin typeface="Aptos"/>
+              </a:rPr>
+              <a:t>WEEK 5 ● LECTURE 10</a:t>
+            </a:r>
+            <a:endParaRPr lang="en-US" sz="1500" b="0" u="none" strike="noStrike" dirty="0">
+              <a:solidFill>
+                <a:srgbClr val="FFFFFF"/>
+              </a:solidFill>
+              <a:effectLst/>
+              <a:uFillTx/>
+              <a:latin typeface="Arial"/>
+            </a:endParaRPr>
+          </a:p>
+        </p:txBody>
+      </p:sp>
       <p:sp>
         <p:nvSpPr>
           <p:cNvPr id="9" name="Text 1"/>
@@ -6623,7 +6552,7 @@
               </a:tabLst>
             </a:pPr>
             <a:r>
-              <a:rPr lang="en-US" sz="2000" b="1" u="none" strike="noStrike" dirty="0">
+              <a:rPr lang="en-US" sz="2000" b="1" u="none" strike="noStrike">
                 <a:solidFill>
                   <a:srgbClr val="FFFFFF"/>
                 </a:solidFill>
@@ -6633,7 +6562,7 @@
               </a:rPr>
               <a:t>generalized phase  →  FIR Types I–IV  →  zero constellations  →  Conv1d bias</a:t>
             </a:r>
-            <a:endParaRPr lang="en-US" sz="2000" b="0" u="none" strike="noStrike" dirty="0">
+            <a:endParaRPr lang="en-US" sz="2000" b="0" u="none" strike="noStrike">
               <a:solidFill>
                 <a:srgbClr val="FFFFFF"/>
               </a:solidFill>
@@ -6765,7 +6694,7 @@
                 <a:uFillTx/>
                 <a:latin typeface="Aptos"/>
               </a:rPr>
-              <a:t>All equations shown as raw $...$ / $$...$$ text</a:t>
+              <a:t>Equations typeset in standard mathematical notation</a:t>
             </a:r>
             <a:endParaRPr lang="en-US" sz="1200" b="0" u="none" strike="noStrike">
               <a:solidFill>
@@ -7179,17 +7108,6 @@
                 <a:tab pos="0" algn="l"/>
               </a:tabLst>
             </a:pPr>
-            <a:r>
-              <a:rPr lang="en-US" sz="2300" b="1" u="none" strike="noStrike">
-                <a:solidFill>
-                  <a:srgbClr val="17365D"/>
-                </a:solidFill>
-                <a:effectLst/>
-                <a:uFillTx/>
-                <a:latin typeface="Aptos"/>
-              </a:rPr>
-              <a:t>$$N\text{ even},\qquad h[n]=h[M-n]$$</a:t>
-            </a:r>
             <a:endParaRPr lang="en-US" sz="2300" b="0" u="none" strike="noStrike">
               <a:solidFill>
                 <a:srgbClr val="000000"/>
@@ -7251,17 +7169,6 @@
                 <a:tab pos="0" algn="l"/>
               </a:tabLst>
             </a:pPr>
-            <a:r>
-              <a:rPr lang="en-US" sz="2100" b="1" u="none" strike="noStrike">
-                <a:solidFill>
-                  <a:srgbClr val="17365D"/>
-                </a:solidFill>
-                <a:effectLst/>
-                <a:uFillTx/>
-                <a:latin typeface="Aptos"/>
-              </a:rPr>
-              <a:t>$$H(e^{j\pi})=0\quad\Longleftrightarrow\quad z=-1\text{ is a zero}$$</a:t>
-            </a:r>
             <a:endParaRPr lang="en-US" sz="2100" b="0" u="none" strike="noStrike">
               <a:solidFill>
                 <a:srgbClr val="000000"/>
@@ -7360,7 +7267,7 @@
                 <a:uFillTx/>
                 <a:latin typeface="Aptos"/>
               </a:rPr>
-              <a:t>Because gain must vanish at Nyquist, a Type II filter cannot realize a high-pass response with nonzero $H(e^{j\pi})$.</a:t>
+              <a:t>Because gain must vanish at Nyquist, a Type II filter cannot realize a high-pass response with nonzero H(e^(jπ)).</a:t>
             </a:r>
             <a:endParaRPr lang="en-US" sz="1800" b="0" u="none" strike="noStrike">
               <a:solidFill>
@@ -7373,6 +7280,54 @@
           </a:p>
         </p:txBody>
       </p:sp>
+      <p:pic>
+        <p:nvPicPr>
+          <p:cNvPr id="89" name="Picture 88" descr="eq_07.png"/>
+          <p:cNvPicPr>
+            <a:picLocks noChangeAspect="1"/>
+          </p:cNvPicPr>
+          <p:nvPr/>
+        </p:nvPicPr>
+        <p:blipFill>
+          <a:blip r:embed="rId3"/>
+          <a:stretch>
+            <a:fillRect/>
+          </a:stretch>
+        </p:blipFill>
+        <p:spPr>
+          <a:xfrm>
+            <a:off x="2036839" y="1459339"/>
+            <a:ext cx="7996041" cy="555681"/>
+          </a:xfrm>
+          <a:prstGeom prst="rect">
+            <a:avLst/>
+          </a:prstGeom>
+        </p:spPr>
+      </p:pic>
+      <p:pic>
+        <p:nvPicPr>
+          <p:cNvPr id="90" name="Picture 89" descr="eq_08.png"/>
+          <p:cNvPicPr>
+            <a:picLocks noChangeAspect="1"/>
+          </p:cNvPicPr>
+          <p:nvPr/>
+        </p:nvPicPr>
+        <p:blipFill>
+          <a:blip r:embed="rId4"/>
+          <a:stretch>
+            <a:fillRect/>
+          </a:stretch>
+        </p:blipFill>
+        <p:spPr>
+          <a:xfrm>
+            <a:off x="1590243" y="2607826"/>
+            <a:ext cx="8889233" cy="590428"/>
+          </a:xfrm>
+          <a:prstGeom prst="rect">
+            <a:avLst/>
+          </a:prstGeom>
+        </p:spPr>
+      </p:pic>
     </p:spTree>
   </p:cSld>
   <p:clrMapOvr>
@@ -7774,17 +7729,6 @@
                 <a:tab pos="0" algn="l"/>
               </a:tabLst>
             </a:pPr>
-            <a:r>
-              <a:rPr lang="en-US" sz="2300" b="1" u="none" strike="noStrike">
-                <a:solidFill>
-                  <a:srgbClr val="17365D"/>
-                </a:solidFill>
-                <a:effectLst/>
-                <a:uFillTx/>
-                <a:latin typeface="Aptos"/>
-              </a:rPr>
-              <a:t>$$N\text{ odd},\qquad h[n]=-h[M-n]$$</a:t>
-            </a:r>
             <a:endParaRPr lang="en-US" sz="2300" b="0" u="none" strike="noStrike">
               <a:solidFill>
                 <a:srgbClr val="000000"/>
@@ -7846,17 +7790,6 @@
                 <a:tab pos="0" algn="l"/>
               </a:tabLst>
             </a:pPr>
-            <a:r>
-              <a:rPr lang="en-US" sz="2300" b="1" u="none" strike="noStrike">
-                <a:solidFill>
-                  <a:srgbClr val="17365D"/>
-                </a:solidFill>
-                <a:effectLst/>
-                <a:uFillTx/>
-                <a:latin typeface="Aptos"/>
-              </a:rPr>
-              <a:t>$$H(e^{j0})=0,\qquad H(e^{j\pi})=0$$</a:t>
-            </a:r>
             <a:endParaRPr lang="en-US" sz="2300" b="0" u="none" strike="noStrike">
               <a:solidFill>
                 <a:srgbClr val="000000"/>
@@ -7924,7 +7857,7 @@
                 <a:uFillTx/>
                 <a:latin typeface="Aptos"/>
               </a:rPr>
-              <a:t>Forced zeros at $z=1$ and $z=-1$.</a:t>
+              <a:t>Forced zeros at z=1 and z=-1.</a:t>
             </a:r>
             <a:endParaRPr lang="en-US" sz="1800" b="0" u="none" strike="noStrike">
               <a:solidFill>
@@ -7999,6 +7932,54 @@
           </a:p>
         </p:txBody>
       </p:sp>
+      <p:pic>
+        <p:nvPicPr>
+          <p:cNvPr id="97" name="Picture 96" descr="eq_09.png"/>
+          <p:cNvPicPr>
+            <a:picLocks noChangeAspect="1"/>
+          </p:cNvPicPr>
+          <p:nvPr/>
+        </p:nvPicPr>
+        <p:blipFill>
+          <a:blip r:embed="rId3"/>
+          <a:stretch>
+            <a:fillRect/>
+          </a:stretch>
+        </p:blipFill>
+        <p:spPr>
+          <a:xfrm>
+            <a:off x="1953848" y="1413619"/>
+            <a:ext cx="8162024" cy="555681"/>
+          </a:xfrm>
+          <a:prstGeom prst="rect">
+            <a:avLst/>
+          </a:prstGeom>
+        </p:spPr>
+      </p:pic>
+      <p:pic>
+        <p:nvPicPr>
+          <p:cNvPr id="98" name="Picture 97" descr="eq_10.png"/>
+          <p:cNvPicPr>
+            <a:picLocks noChangeAspect="1"/>
+          </p:cNvPicPr>
+          <p:nvPr/>
+        </p:nvPicPr>
+        <p:blipFill>
+          <a:blip r:embed="rId4"/>
+          <a:stretch>
+            <a:fillRect/>
+          </a:stretch>
+        </p:blipFill>
+        <p:spPr>
+          <a:xfrm>
+            <a:off x="2728459" y="2562106"/>
+            <a:ext cx="6612802" cy="590428"/>
+          </a:xfrm>
+          <a:prstGeom prst="rect">
+            <a:avLst/>
+          </a:prstGeom>
+        </p:spPr>
+      </p:pic>
     </p:spTree>
   </p:cSld>
   <p:clrMapOvr>
@@ -8400,17 +8381,6 @@
                 <a:tab pos="0" algn="l"/>
               </a:tabLst>
             </a:pPr>
-            <a:r>
-              <a:rPr lang="en-US" sz="2300" b="1" u="none" strike="noStrike">
-                <a:solidFill>
-                  <a:srgbClr val="17365D"/>
-                </a:solidFill>
-                <a:effectLst/>
-                <a:uFillTx/>
-                <a:latin typeface="Aptos"/>
-              </a:rPr>
-              <a:t>$$N\text{ even},\qquad h[n]=-h[M-n]$$</a:t>
-            </a:r>
             <a:endParaRPr lang="en-US" sz="2300" b="0" u="none" strike="noStrike">
               <a:solidFill>
                 <a:srgbClr val="000000"/>
@@ -8472,17 +8442,6 @@
                 <a:tab pos="0" algn="l"/>
               </a:tabLst>
             </a:pPr>
-            <a:r>
-              <a:rPr lang="en-US" sz="2400" b="1" u="none" strike="noStrike">
-                <a:solidFill>
-                  <a:srgbClr val="17365D"/>
-                </a:solidFill>
-                <a:effectLst/>
-                <a:uFillTx/>
-                <a:latin typeface="Aptos"/>
-              </a:rPr>
-              <a:t>$$H(e^{j0})=0$$</a:t>
-            </a:r>
             <a:endParaRPr lang="en-US" sz="2400" b="0" u="none" strike="noStrike">
               <a:solidFill>
                 <a:srgbClr val="000000"/>
@@ -8625,6 +8584,54 @@
           </a:p>
         </p:txBody>
       </p:sp>
+      <p:pic>
+        <p:nvPicPr>
+          <p:cNvPr id="105" name="Picture 104" descr="eq_11.png"/>
+          <p:cNvPicPr>
+            <a:picLocks noChangeAspect="1"/>
+          </p:cNvPicPr>
+          <p:nvPr/>
+        </p:nvPicPr>
+        <p:blipFill>
+          <a:blip r:embed="rId3"/>
+          <a:stretch>
+            <a:fillRect/>
+          </a:stretch>
+        </p:blipFill>
+        <p:spPr>
+          <a:xfrm>
+            <a:off x="1777040" y="1413619"/>
+            <a:ext cx="8515640" cy="555681"/>
+          </a:xfrm>
+          <a:prstGeom prst="rect">
+            <a:avLst/>
+          </a:prstGeom>
+        </p:spPr>
+      </p:pic>
+      <p:pic>
+        <p:nvPicPr>
+          <p:cNvPr id="106" name="Picture 105" descr="eq_12.png"/>
+          <p:cNvPicPr>
+            <a:picLocks noChangeAspect="1"/>
+          </p:cNvPicPr>
+          <p:nvPr/>
+        </p:nvPicPr>
+        <p:blipFill>
+          <a:blip r:embed="rId4"/>
+          <a:stretch>
+            <a:fillRect/>
+          </a:stretch>
+        </p:blipFill>
+        <p:spPr>
+          <a:xfrm>
+            <a:off x="4812360" y="2556619"/>
+            <a:ext cx="2444999" cy="555681"/>
+          </a:xfrm>
+          <a:prstGeom prst="rect">
+            <a:avLst/>
+          </a:prstGeom>
+        </p:spPr>
+      </p:pic>
     </p:spTree>
   </p:cSld>
   <p:clrMapOvr>
@@ -9032,7 +9039,7 @@
                 <a:uFillTx/>
                 <a:latin typeface="Aptos"/>
               </a:rPr>
-              <a:t>A high-pass normally requires appreciable gain near $\omega=\pi$.</a:t>
+              <a:t>A high-pass normally requires appreciable gain near ω=π.</a:t>
             </a:r>
             <a:endParaRPr lang="en-US" sz="1800" b="0" u="none" strike="noStrike">
               <a:solidFill>
@@ -9063,7 +9070,7 @@
                 <a:uFillTx/>
                 <a:latin typeface="Aptos"/>
               </a:rPr>
-              <a:t>Type II symmetry forces $H(e^{j\pi})=0$.</a:t>
+              <a:t>Type II symmetry forces H(e^(jπ))=0.</a:t>
             </a:r>
             <a:endParaRPr lang="en-US" sz="1800" b="0" u="none" strike="noStrike">
               <a:solidFill>
@@ -9539,17 +9546,6 @@
                 <a:tab pos="0" algn="l"/>
               </a:tabLst>
             </a:pPr>
-            <a:r>
-              <a:rPr lang="en-US" sz="2500" b="1" u="none" strike="noStrike">
-                <a:solidFill>
-                  <a:srgbClr val="17365D"/>
-                </a:solidFill>
-                <a:effectLst/>
-                <a:uFillTx/>
-                <a:latin typeface="Aptos"/>
-              </a:rPr>
-              <a:t>$$z_0,\quad z_0^*,\quad \frac{1}{z_0},\quad \frac{1}{z_0^*}$$</a:t>
-            </a:r>
             <a:endParaRPr lang="en-US" sz="2500" b="0" u="none" strike="noStrike">
               <a:solidFill>
                 <a:srgbClr val="000000"/>
@@ -9963,6 +9959,30 @@
           </a:p>
         </p:txBody>
       </p:sp>
+      <p:pic>
+        <p:nvPicPr>
+          <p:cNvPr id="124" name="Picture 123" descr="eq_13.png"/>
+          <p:cNvPicPr>
+            <a:picLocks noChangeAspect="1"/>
+          </p:cNvPicPr>
+          <p:nvPr/>
+        </p:nvPicPr>
+        <p:blipFill>
+          <a:blip r:embed="rId4"/>
+          <a:stretch>
+            <a:fillRect/>
+          </a:stretch>
+        </p:blipFill>
+        <p:spPr>
+          <a:xfrm>
+            <a:off x="4478432" y="1424592"/>
+            <a:ext cx="3112855" cy="625176"/>
+          </a:xfrm>
+          <a:prstGeom prst="rect">
+            <a:avLst/>
+          </a:prstGeom>
+        </p:spPr>
+      </p:pic>
     </p:spTree>
   </p:cSld>
   <p:clrMapOvr>
@@ -10401,7 +10421,7 @@
                 <a:uFillTx/>
                 <a:latin typeface="Aptos"/>
               </a:rPr>
-              <a:t>If $z_0$ is a zero, reciprocal symmetry forces $1/z_0$ (with conjugation as required for real coefficients).</a:t>
+              <a:t>If z₀ is a zero, reciprocal symmetry forces 1/z₀ (with conjugation as required for real coefficients).</a:t>
             </a:r>
             <a:endParaRPr lang="en-US" sz="1800" b="0" u="none" strike="noStrike">
               <a:solidFill>
@@ -10495,17 +10515,6 @@
                 <a:tab pos="0" algn="l"/>
               </a:tabLst>
             </a:pPr>
-            <a:r>
-              <a:rPr lang="en-US" sz="2300" b="1" u="none" strike="noStrike">
-                <a:solidFill>
-                  <a:srgbClr val="17365D"/>
-                </a:solidFill>
-                <a:effectLst/>
-                <a:uFillTx/>
-                <a:latin typeface="Aptos"/>
-              </a:rPr>
-              <a:t>$$H(z)=\pm z^{-M}H(z^{-1})$$</a:t>
-            </a:r>
             <a:endParaRPr lang="en-US" sz="2300" b="0" u="none" strike="noStrike">
               <a:solidFill>
                 <a:srgbClr val="000000"/>
@@ -10517,6 +10526,30 @@
           </a:p>
         </p:txBody>
       </p:sp>
+      <p:pic>
+        <p:nvPicPr>
+          <p:cNvPr id="131" name="Picture 130" descr="eq_14.png"/>
+          <p:cNvPicPr>
+            <a:picLocks noChangeAspect="1"/>
+          </p:cNvPicPr>
+          <p:nvPr/>
+        </p:nvPicPr>
+        <p:blipFill>
+          <a:blip r:embed="rId3"/>
+          <a:stretch>
+            <a:fillRect/>
+          </a:stretch>
+        </p:blipFill>
+        <p:spPr>
+          <a:xfrm>
+            <a:off x="3567977" y="4802386"/>
+            <a:ext cx="5025205" cy="590428"/>
+          </a:xfrm>
+          <a:prstGeom prst="rect">
+            <a:avLst/>
+          </a:prstGeom>
+        </p:spPr>
+      </p:pic>
     </p:spTree>
   </p:cSld>
   <p:clrMapOvr>
@@ -10924,7 +10957,7 @@
                 <a:uFillTx/>
                 <a:latin typeface="Aptos"/>
               </a:rPr>
-              <a:t>When the real amplitude factor $A(\omega)$ crosses zero, its sign changes.</a:t>
+              <a:t>When the real amplitude factor A(ω) crosses zero, its sign changes.</a:t>
             </a:r>
             <a:endParaRPr lang="en-US" sz="1800" b="0" u="none" strike="noStrike">
               <a:solidFill>
@@ -10955,7 +10988,7 @@
                 <a:uFillTx/>
                 <a:latin typeface="Aptos"/>
               </a:rPr>
-              <a:t>A negative real amplitude contributes an additional $\pi$ to the displayed phase.</a:t>
+              <a:t>A negative real amplitude contributes an additional π to the displayed phase.</a:t>
             </a:r>
             <a:endParaRPr lang="en-US" sz="1800" b="0" u="none" strike="noStrike">
               <a:solidFill>
@@ -10986,7 +11019,7 @@
                 <a:uFillTx/>
                 <a:latin typeface="Aptos"/>
               </a:rPr>
-              <a:t>The unwrapped phase may show jumps, but the underlying delay term remains $-\omega M/2$.</a:t>
+              <a:t>The unwrapped phase may show jumps, but the underlying delay term remains -ω M/2.</a:t>
             </a:r>
             <a:endParaRPr lang="en-US" sz="1800" b="0" u="none" strike="noStrike">
               <a:solidFill>
@@ -11431,17 +11464,6 @@
                 <a:tab pos="0" algn="l"/>
               </a:tabLst>
             </a:pPr>
-            <a:r>
-              <a:rPr lang="en-US" sz="1900" b="1" u="none" strike="noStrike">
-                <a:solidFill>
-                  <a:srgbClr val="17365D"/>
-                </a:solidFill>
-                <a:effectLst/>
-                <a:uFillTx/>
-                <a:latin typeface="Aptos"/>
-              </a:rPr>
-              <a:t>$$y_c[n]=b_c+\sum_{m}\sum_{k=0}^{K-1}w_{c,m}[k]x_m[n+k]$$</a:t>
-            </a:r>
             <a:endParaRPr lang="en-US" sz="1900" b="0" u="none" strike="noStrike">
               <a:solidFill>
                 <a:srgbClr val="000000"/>
@@ -11584,6 +11606,30 @@
           </a:p>
         </p:txBody>
       </p:sp>
+      <p:pic>
+        <p:nvPicPr>
+          <p:cNvPr id="144" name="Picture 143" descr="eq_15.png"/>
+          <p:cNvPicPr>
+            <a:picLocks noChangeAspect="1"/>
+          </p:cNvPicPr>
+          <p:nvPr/>
+        </p:nvPicPr>
+        <p:blipFill>
+          <a:blip r:embed="rId3"/>
+          <a:stretch>
+            <a:fillRect/>
+          </a:stretch>
+        </p:blipFill>
+        <p:spPr>
+          <a:xfrm>
+            <a:off x="4085431" y="1430078"/>
+            <a:ext cx="3990298" cy="659923"/>
+          </a:xfrm>
+          <a:prstGeom prst="rect">
+            <a:avLst/>
+          </a:prstGeom>
+        </p:spPr>
+      </p:pic>
     </p:spTree>
   </p:cSld>
   <p:clrMapOvr>
@@ -12549,17 +12595,6 @@
                 <a:tab pos="0" algn="l"/>
               </a:tabLst>
             </a:pPr>
-            <a:r>
-              <a:rPr lang="en-US" sz="2300" b="1" u="none" strike="noStrike">
-                <a:solidFill>
-                  <a:srgbClr val="17365D"/>
-                </a:solidFill>
-                <a:effectLst/>
-                <a:uFillTx/>
-                <a:latin typeface="Aptos"/>
-              </a:rPr>
-              <a:t>$$h=[a_0,a_1,\ldots,a_R,\ldots,a_1,a_0]$$</a:t>
-            </a:r>
             <a:endParaRPr lang="en-US" sz="2300" b="0" u="none" strike="noStrike">
               <a:solidFill>
                 <a:srgbClr val="000000"/>
@@ -12733,6 +12768,30 @@
           </a:p>
         </p:txBody>
       </p:sp>
+      <p:pic>
+        <p:nvPicPr>
+          <p:cNvPr id="160" name="Picture 159" descr="eq_16.png"/>
+          <p:cNvPicPr>
+            <a:picLocks noChangeAspect="1"/>
+          </p:cNvPicPr>
+          <p:nvPr/>
+        </p:nvPicPr>
+        <p:blipFill>
+          <a:blip r:embed="rId3"/>
+          <a:stretch>
+            <a:fillRect/>
+          </a:stretch>
+        </p:blipFill>
+        <p:spPr>
+          <a:xfrm>
+            <a:off x="1912929" y="1464826"/>
+            <a:ext cx="8243862" cy="590428"/>
+          </a:xfrm>
+          <a:prstGeom prst="rect">
+            <a:avLst/>
+          </a:prstGeom>
+        </p:spPr>
+      </p:pic>
     </p:spTree>
   </p:cSld>
   <p:clrMapOvr>
@@ -16426,7 +16485,7 @@
                 <a:uFillTx/>
                 <a:latin typeface="Aptos"/>
               </a:rPr>
-              <a:t>Answer: Type II because $N$ is even and the taps are symmetric.</a:t>
+              <a:t>Answer: Type II because N is even and the taps are symmetric.</a:t>
             </a:r>
             <a:endParaRPr lang="en-US" sz="1900" b="0" u="none" strike="noStrike">
               <a:solidFill>
@@ -16457,7 +16516,7 @@
                 <a:uFillTx/>
                 <a:latin typeface="Aptos"/>
               </a:rPr>
-              <a:t>What endpoint must be zero? $H(e^{j\pi})=0$.</a:t>
+              <a:t>What endpoint must be zero? H(e^(jπ))=0.</a:t>
             </a:r>
             <a:endParaRPr lang="en-US" sz="1900" b="0" u="none" strike="noStrike">
               <a:solidFill>
@@ -18152,7 +18211,7 @@
                 <a:uFillTx/>
                 <a:latin typeface="Aptos"/>
               </a:rPr>
-              <a:t>7 • Complete the four-zero constellation for $z_0=0.7e^{j0.6}$.</a:t>
+              <a:t>7 • Complete the four-zero constellation for z₀=0.7e^(j0.6).</a:t>
             </a:r>
             <a:endParaRPr lang="en-US" sz="1800" b="0" u="none" strike="noStrike">
               <a:solidFill>
@@ -18603,7 +18662,7 @@
                 <a:uFillTx/>
                 <a:latin typeface="Aptos"/>
               </a:rPr>
-              <a:t>Q1 • What geometric quantities determine $|H(e^{j\omega})|$ from a pole-zero plot?</a:t>
+              <a:t>Q1 • What geometric quantities determine |H(e^(jω))| from a pole-zero plot?</a:t>
             </a:r>
             <a:endParaRPr lang="en-US" sz="1800" b="0" u="none" strike="noStrike">
               <a:solidFill>
@@ -18634,7 +18693,7 @@
                 <a:uFillTx/>
                 <a:latin typeface="Aptos"/>
               </a:rPr>
-              <a:t>Q2 • State $\tau_p(\omega)$ and $\tau_g(\omega)$.</a:t>
+              <a:t>Q2 • State τₚ(ω) and τg(ω).</a:t>
             </a:r>
             <a:endParaRPr lang="en-US" sz="1800" b="0" u="none" strike="noStrike">
               <a:solidFill>
@@ -19116,7 +19175,7 @@
                 <a:uFillTx/>
                 <a:latin typeface="Aptos"/>
               </a:rPr>
-              <a:t>Q5 • A real symmetric FIR has $N=21$. What is its group delay?</a:t>
+              <a:t>Q5 • A real symmetric FIR has N=21. What is its group delay?</a:t>
             </a:r>
             <a:endParaRPr lang="en-US" sz="1800" b="0" u="none" strike="noStrike">
               <a:solidFill>
@@ -19178,7 +19237,7 @@
                 <a:uFillTx/>
                 <a:latin typeface="Aptos"/>
               </a:rPr>
-              <a:t>Q7 • If a complex zero $z_0$ is off the unit circle, what other three zeros accompany it in a real linear-phase FIR?</a:t>
+              <a:t>Q7 • If a complex zero z₀ is off the unit circle, what other three zeros accompany it in a real linear-phase FIR?</a:t>
             </a:r>
             <a:endParaRPr lang="en-US" sz="1800" b="0" u="none" strike="noStrike">
               <a:solidFill>
@@ -19623,17 +19682,6 @@
                 <a:tab pos="0" algn="l"/>
               </a:tabLst>
             </a:pPr>
-            <a:r>
-              <a:rPr lang="en-US" sz="2500" b="1" u="none" strike="noStrike">
-                <a:solidFill>
-                  <a:srgbClr val="17365D"/>
-                </a:solidFill>
-                <a:effectLst/>
-                <a:uFillTx/>
-                <a:latin typeface="Aptos"/>
-              </a:rPr>
-              <a:t>$$\angle H(e^{j\omega})=\beta-\alpha\omega$$</a:t>
-            </a:r>
             <a:endParaRPr lang="en-US" sz="2500" b="0" u="none" strike="noStrike">
               <a:solidFill>
                 <a:srgbClr val="000000"/>
@@ -19695,17 +19743,6 @@
                 <a:tab pos="0" algn="l"/>
               </a:tabLst>
             </a:pPr>
-            <a:r>
-              <a:rPr lang="en-US" sz="2200" b="1" u="none" strike="noStrike">
-                <a:solidFill>
-                  <a:srgbClr val="17365D"/>
-                </a:solidFill>
-                <a:effectLst/>
-                <a:uFillTx/>
-                <a:latin typeface="Aptos"/>
-              </a:rPr>
-              <a:t>$$H(e^{j\omega})=e^{-j\alpha\omega}e^{j\beta}A(\omega)$$</a:t>
-            </a:r>
             <a:endParaRPr lang="en-US" sz="2200" b="0" u="none" strike="noStrike">
               <a:solidFill>
                 <a:srgbClr val="000000"/>
@@ -19773,7 +19810,7 @@
                 <a:uFillTx/>
                 <a:latin typeface="Aptos"/>
               </a:rPr>
-              <a:t>$A(\omega)$ is real for the standard real-coefficient linear-phase FIR cases.</a:t>
+              <a:t>A(ω) is real for the standard real-coefficient linear-phase FIR cases.</a:t>
             </a:r>
             <a:endParaRPr lang="en-US" sz="1800" b="0" u="none" strike="noStrike">
               <a:solidFill>
@@ -19804,7 +19841,7 @@
                 <a:uFillTx/>
                 <a:latin typeface="Aptos"/>
               </a:rPr>
-              <a:t>Its sign can cause $\pi$ phase jumps without changing the underlying constant group delay.</a:t>
+              <a:t>Its sign can cause π phase jumps without changing the underlying constant group delay.</a:t>
             </a:r>
             <a:endParaRPr lang="en-US" sz="1800" b="0" u="none" strike="noStrike">
               <a:solidFill>
@@ -19835,7 +19872,7 @@
                 <a:uFillTx/>
                 <a:latin typeface="Aptos"/>
               </a:rPr>
-              <a:t>The physically important quantity is $\tau_g=\alpha$.</a:t>
+              <a:t>The physically important quantity is τg=α.</a:t>
             </a:r>
             <a:endParaRPr lang="en-US" sz="1800" b="0" u="none" strike="noStrike">
               <a:solidFill>
@@ -19848,6 +19885,54 @@
           </a:p>
         </p:txBody>
       </p:sp>
+      <p:pic>
+        <p:nvPicPr>
+          <p:cNvPr id="28" name="Picture 27" descr="eq_00.png"/>
+          <p:cNvPicPr>
+            <a:picLocks noChangeAspect="1"/>
+          </p:cNvPicPr>
+          <p:nvPr/>
+        </p:nvPicPr>
+        <p:blipFill>
+          <a:blip r:embed="rId3"/>
+          <a:stretch>
+            <a:fillRect/>
+          </a:stretch>
+        </p:blipFill>
+        <p:spPr>
+          <a:xfrm>
+            <a:off x="3839203" y="1464826"/>
+            <a:ext cx="4391314" cy="590428"/>
+          </a:xfrm>
+          <a:prstGeom prst="rect">
+            <a:avLst/>
+          </a:prstGeom>
+        </p:spPr>
+      </p:pic>
+      <p:pic>
+        <p:nvPicPr>
+          <p:cNvPr id="29" name="Picture 28" descr="eq_01.png"/>
+          <p:cNvPicPr>
+            <a:picLocks noChangeAspect="1"/>
+          </p:cNvPicPr>
+          <p:nvPr/>
+        </p:nvPicPr>
+        <p:blipFill>
+          <a:blip r:embed="rId4"/>
+          <a:stretch>
+            <a:fillRect/>
+          </a:stretch>
+        </p:blipFill>
+        <p:spPr>
+          <a:xfrm>
+            <a:off x="3186528" y="2607826"/>
+            <a:ext cx="5696664" cy="590428"/>
+          </a:xfrm>
+          <a:prstGeom prst="rect">
+            <a:avLst/>
+          </a:prstGeom>
+        </p:spPr>
+      </p:pic>
     </p:spTree>
   </p:cSld>
   <p:clrMapOvr>
@@ -20286,7 +20371,7 @@
                 <a:uFillTx/>
                 <a:latin typeface="Aptos"/>
               </a:rPr>
-              <a:t>A2: $\tau_p=-\angle H/\omega$ and $\tau_g=-d(\angle H)/d\omega$.</a:t>
+              <a:t>A2: τₚ=-∠ H/ω and τg=-d(∠ H)/dω.</a:t>
             </a:r>
             <a:endParaRPr lang="en-US" sz="1600" b="0" u="none" strike="noStrike">
               <a:solidFill>
@@ -20317,7 +20402,7 @@
                 <a:uFillTx/>
                 <a:latin typeface="Aptos"/>
               </a:rPr>
-              <a:t>A3: $|H_{ap}(e^{j\omega})|=1$ for all $\omega$.</a:t>
+              <a:t>A3: |Hₐₚ(e^(jω))|=1 for all ω.</a:t>
             </a:r>
             <a:endParaRPr lang="en-US" sz="1600" b="0" u="none" strike="noStrike">
               <a:solidFill>
@@ -20379,7 +20464,7 @@
                 <a:uFillTx/>
                 <a:latin typeface="Aptos"/>
               </a:rPr>
-              <a:t>A5: $10$ samples.</a:t>
+              <a:t>A5: 10 samples.</a:t>
             </a:r>
             <a:endParaRPr lang="en-US" sz="1600" b="0" u="none" strike="noStrike">
               <a:solidFill>
@@ -20410,7 +20495,7 @@
                 <a:uFillTx/>
                 <a:latin typeface="Aptos"/>
               </a:rPr>
-              <a:t>A6: Type II; forced zero at $z=-1$ or $\omega=\pi$.</a:t>
+              <a:t>A6: Type II; forced zero at z=-1 or ω=π.</a:t>
             </a:r>
             <a:endParaRPr lang="en-US" sz="1600" b="0" u="none" strike="noStrike">
               <a:solidFill>
@@ -20441,7 +20526,7 @@
                 <a:uFillTx/>
                 <a:latin typeface="Aptos"/>
               </a:rPr>
-              <a:t>A7: $z_0^*$, $1/z_0$, and $1/z_0^*$.</a:t>
+              <a:t>A7: z₀*, 1/z₀, and 1/z₀*.</a:t>
             </a:r>
             <a:endParaRPr lang="en-US" sz="1600" b="0" u="none" strike="noStrike">
               <a:solidFill>
@@ -20892,7 +20977,7 @@
                 <a:uFillTx/>
                 <a:latin typeface="Aptos"/>
               </a:rPr>
-              <a:t>P5: $H(e^{j\omega})=e^{-j\omega M/2}A(\omega)$, so $\tau_g=M/2=(N-1)/2$.</a:t>
+              <a:t>P5: H(e^(jω))=e^(-jω M/2)A(ω), so τg=M/2=(N-1)/2.</a:t>
             </a:r>
             <a:endParaRPr lang="en-US" sz="1700" b="0" u="none" strike="noStrike">
               <a:solidFill>
@@ -20923,7 +21008,7 @@
                 <a:uFillTx/>
                 <a:latin typeface="Aptos"/>
               </a:rPr>
-              <a:t>P6: I = odd/symmetric; II = even/symmetric with $\omega=\pi$ zero; III = odd/antisymmetric with $0$ and $\pi$ zeros; IV = even/antisymmetric with $0$ zero.</a:t>
+              <a:t>P6: I = odd/symmetric; II = even/symmetric with ω=π zero; III = odd/antisymmetric with 0 and π zeros; IV = even/antisymmetric with 0 zero.</a:t>
             </a:r>
             <a:endParaRPr lang="en-US" sz="1700" b="0" u="none" strike="noStrike">
               <a:solidFill>
@@ -20954,7 +21039,7 @@
                 <a:uFillTx/>
                 <a:latin typeface="Aptos"/>
               </a:rPr>
-              <a:t>P7: $z_0$, $z_0^*$, $1/z_0$, $1/z_0^*$.</a:t>
+              <a:t>P7: z₀, z₀*, 1/z₀, 1/z₀*.</a:t>
             </a:r>
             <a:endParaRPr lang="en-US" sz="1700" b="0" u="none" strike="noStrike">
               <a:solidFill>
@@ -22070,17 +22155,6 @@
                 <a:tab pos="0" algn="l"/>
               </a:tabLst>
             </a:pPr>
-            <a:r>
-              <a:rPr lang="en-US" sz="2400" b="1" u="none" strike="noStrike">
-                <a:solidFill>
-                  <a:srgbClr val="17365D"/>
-                </a:solidFill>
-                <a:effectLst/>
-                <a:uFillTx/>
-                <a:latin typeface="Aptos"/>
-              </a:rPr>
-              <a:t>$$h[n]=h[M-n]$$</a:t>
-            </a:r>
             <a:endParaRPr lang="en-US" sz="2400" b="0" u="none" strike="noStrike">
               <a:solidFill>
                 <a:srgbClr val="000000"/>
@@ -22142,17 +22216,6 @@
                 <a:tab pos="0" algn="l"/>
               </a:tabLst>
             </a:pPr>
-            <a:r>
-              <a:rPr lang="en-US" sz="2400" b="1" u="none" strike="noStrike">
-                <a:solidFill>
-                  <a:srgbClr val="17365D"/>
-                </a:solidFill>
-                <a:effectLst/>
-                <a:uFillTx/>
-                <a:latin typeface="Aptos"/>
-              </a:rPr>
-              <a:t>$$h[n]=-h[M-n]$$</a:t>
-            </a:r>
             <a:endParaRPr lang="en-US" sz="2400" b="0" u="none" strike="noStrike">
               <a:solidFill>
                 <a:srgbClr val="000000"/>
@@ -22340,7 +22403,7 @@
                 <a:uFillTx/>
                 <a:latin typeface="Aptos"/>
               </a:rPr>
-              <a:t>Pairing $n$ with $M-n$ yields cosine terms after factoring out $e^{-j\omega M/2}$.</a:t>
+              <a:t>Pairing n with M-n yields cosine terms after factoring out e^(-jω M/2).</a:t>
             </a:r>
             <a:endParaRPr lang="en-US" sz="1600" b="0" u="none" strike="noStrike">
               <a:solidFill>
@@ -22529,7 +22592,7 @@
                 <a:uFillTx/>
                 <a:latin typeface="Aptos"/>
               </a:rPr>
-              <a:t>Pairing produces sine terms and an additional $\pm\pi/2$ phase offset.</a:t>
+              <a:t>Pairing produces sine terms and an additional ±π/2 phase offset.</a:t>
             </a:r>
             <a:endParaRPr lang="en-US" sz="1600" b="0" u="none" strike="noStrike">
               <a:solidFill>
@@ -22592,17 +22655,6 @@
                 <a:tab pos="0" algn="l"/>
               </a:tabLst>
             </a:pPr>
-            <a:r>
-              <a:rPr lang="en-US" sz="2200" b="1" u="none" strike="noStrike">
-                <a:solidFill>
-                  <a:srgbClr val="17365D"/>
-                </a:solidFill>
-                <a:effectLst/>
-                <a:uFillTx/>
-                <a:latin typeface="Aptos"/>
-              </a:rPr>
-              <a:t>$$H(e^{j\omega})=e^{-j\omega M/2}A(\omega)$$</a:t>
-            </a:r>
             <a:endParaRPr lang="en-US" sz="2200" b="0" u="none" strike="noStrike">
               <a:solidFill>
                 <a:srgbClr val="000000"/>
@@ -22614,6 +22666,78 @@
           </a:p>
         </p:txBody>
       </p:sp>
+      <p:pic>
+        <p:nvPicPr>
+          <p:cNvPr id="51" name="Picture 50" descr="eq_02.png"/>
+          <p:cNvPicPr>
+            <a:picLocks noChangeAspect="1"/>
+          </p:cNvPicPr>
+          <p:nvPr/>
+        </p:nvPicPr>
+        <p:blipFill>
+          <a:blip r:embed="rId3"/>
+          <a:stretch>
+            <a:fillRect/>
+          </a:stretch>
+        </p:blipFill>
+        <p:spPr>
+          <a:xfrm>
+            <a:off x="1229964" y="1453853"/>
+            <a:ext cx="4214832" cy="520934"/>
+          </a:xfrm>
+          <a:prstGeom prst="rect">
+            <a:avLst/>
+          </a:prstGeom>
+        </p:spPr>
+      </p:pic>
+      <p:pic>
+        <p:nvPicPr>
+          <p:cNvPr id="52" name="Picture 51" descr="eq_03.png"/>
+          <p:cNvPicPr>
+            <a:picLocks noChangeAspect="1"/>
+          </p:cNvPicPr>
+          <p:nvPr/>
+        </p:nvPicPr>
+        <p:blipFill>
+          <a:blip r:embed="rId4"/>
+          <a:stretch>
+            <a:fillRect/>
+          </a:stretch>
+        </p:blipFill>
+        <p:spPr>
+          <a:xfrm>
+            <a:off x="6530623" y="1460258"/>
+            <a:ext cx="4586313" cy="508123"/>
+          </a:xfrm>
+          <a:prstGeom prst="rect">
+            <a:avLst/>
+          </a:prstGeom>
+        </p:spPr>
+      </p:pic>
+      <p:pic>
+        <p:nvPicPr>
+          <p:cNvPr id="53" name="Picture 52" descr="eq_04.png"/>
+          <p:cNvPicPr>
+            <a:picLocks noChangeAspect="1"/>
+          </p:cNvPicPr>
+          <p:nvPr/>
+        </p:nvPicPr>
+        <p:blipFill>
+          <a:blip r:embed="rId5"/>
+          <a:stretch>
+            <a:fillRect/>
+          </a:stretch>
+        </p:blipFill>
+        <p:spPr>
+          <a:xfrm>
+            <a:off x="3420656" y="4842619"/>
+            <a:ext cx="5136967" cy="555681"/>
+          </a:xfrm>
+          <a:prstGeom prst="rect">
+            <a:avLst/>
+          </a:prstGeom>
+        </p:spPr>
+      </p:pic>
     </p:spTree>
   </p:cSld>
   <p:clrMapOvr>
@@ -23021,7 +23145,7 @@
                 <a:uFillTx/>
                 <a:latin typeface="Aptos"/>
               </a:rPr>
-              <a:t>Start with $H(e^{j\omega})=\sum_{n=0}^{M}h[n]e^{-j\omega n}$.</a:t>
+              <a:t>Start with H(e^(jω))=Σₙ₌₀^(M)h[n]e^(-jω n).</a:t>
             </a:r>
             <a:endParaRPr lang="en-US" sz="1800" b="0" u="none" strike="noStrike">
               <a:solidFill>
@@ -23052,7 +23176,7 @@
                 <a:uFillTx/>
                 <a:latin typeface="Aptos"/>
               </a:rPr>
-              <a:t>Pair $n$ with $M-n$ using $h[n]=h[M-n]$.</a:t>
+              <a:t>Pair n with M-n using h[n]=h[M-n].</a:t>
             </a:r>
             <a:endParaRPr lang="en-US" sz="1800" b="0" u="none" strike="noStrike">
               <a:solidFill>
@@ -23083,7 +23207,7 @@
                 <a:uFillTx/>
                 <a:latin typeface="Aptos"/>
               </a:rPr>
-              <a:t>Each pair becomes a real cosine factor times $e^{-j\omega M/2}$.</a:t>
+              <a:t>Each pair becomes a real cosine factor times e^(-jω M/2).</a:t>
             </a:r>
             <a:endParaRPr lang="en-US" sz="1800" b="0" u="none" strike="noStrike">
               <a:solidFill>
@@ -23114,7 +23238,7 @@
                 <a:uFillTx/>
                 <a:latin typeface="Aptos"/>
               </a:rPr>
-              <a:t>Therefore all non-sign phase is the pure delay term $-\omega M/2$.</a:t>
+              <a:t>Therefore all non-sign phase is the pure delay term -ω M/2.</a:t>
             </a:r>
             <a:endParaRPr lang="en-US" sz="1800" b="0" u="none" strike="noStrike">
               <a:solidFill>
@@ -23177,17 +23301,6 @@
                 <a:tab pos="0" algn="l"/>
               </a:tabLst>
             </a:pPr>
-            <a:r>
-              <a:rPr lang="en-US" sz="2400" b="1" u="none" strike="noStrike">
-                <a:solidFill>
-                  <a:srgbClr val="17365D"/>
-                </a:solidFill>
-                <a:effectLst/>
-                <a:uFillTx/>
-                <a:latin typeface="Aptos"/>
-              </a:rPr>
-              <a:t>$$\tau_g=\frac{M}{2}=\frac{N-1}{2}$$</a:t>
-            </a:r>
             <a:endParaRPr lang="en-US" sz="2400" b="0" u="none" strike="noStrike">
               <a:solidFill>
                 <a:srgbClr val="000000"/>
@@ -23199,6 +23312,30 @@
           </a:p>
         </p:txBody>
       </p:sp>
+      <p:pic>
+        <p:nvPicPr>
+          <p:cNvPr id="58" name="Picture 57" descr="eq_05.png"/>
+          <p:cNvPicPr>
+            <a:picLocks noChangeAspect="1"/>
+          </p:cNvPicPr>
+          <p:nvPr/>
+        </p:nvPicPr>
+        <p:blipFill>
+          <a:blip r:embed="rId3"/>
+          <a:stretch>
+            <a:fillRect/>
+          </a:stretch>
+        </p:blipFill>
+        <p:spPr>
+          <a:xfrm>
+            <a:off x="4811886" y="5025499"/>
+            <a:ext cx="2445948" cy="555681"/>
+          </a:xfrm>
+          <a:prstGeom prst="rect">
+            <a:avLst/>
+          </a:prstGeom>
+        </p:spPr>
+      </p:pic>
     </p:spTree>
   </p:cSld>
   <p:clrMapOvr>
@@ -23606,7 +23743,7 @@
                 <a:uFillTx/>
                 <a:latin typeface="Aptos"/>
               </a:rPr>
-              <a:t>For $h[n]=-h[M-n]$, paired terms become proportional to $\sin((M/2-n)\omega)$.</a:t>
+              <a:t>For h[n]=-h[M-n], paired terms become proportional to sin((M/2-n)ω).</a:t>
             </a:r>
             <a:endParaRPr lang="en-US" sz="1800" b="0" u="none" strike="noStrike">
               <a:solidFill>
@@ -24088,7 +24225,7 @@
                 <a:uFillTx/>
                 <a:latin typeface="Aptos"/>
               </a:rPr>
-              <a:t>Type I • odd $N$, symmetric.</a:t>
+              <a:t>Type I • odd N, symmetric.</a:t>
             </a:r>
             <a:endParaRPr lang="en-US" sz="1900" b="0" u="none" strike="noStrike">
               <a:solidFill>
@@ -24119,7 +24256,7 @@
                 <a:uFillTx/>
                 <a:latin typeface="Aptos"/>
               </a:rPr>
-              <a:t>Type II • even $N$, symmetric.</a:t>
+              <a:t>Type II • even N, symmetric.</a:t>
             </a:r>
             <a:endParaRPr lang="en-US" sz="1900" b="0" u="none" strike="noStrike">
               <a:solidFill>
@@ -24150,7 +24287,7 @@
                 <a:uFillTx/>
                 <a:latin typeface="Aptos"/>
               </a:rPr>
-              <a:t>Type III • odd $N$, antisymmetric.</a:t>
+              <a:t>Type III • odd N, antisymmetric.</a:t>
             </a:r>
             <a:endParaRPr lang="en-US" sz="1900" b="0" u="none" strike="noStrike">
               <a:solidFill>
@@ -24181,7 +24318,7 @@
                 <a:uFillTx/>
                 <a:latin typeface="Aptos"/>
               </a:rPr>
-              <a:t>Type IV • even $N$, antisymmetric.</a:t>
+              <a:t>Type IV • even N, antisymmetric.</a:t>
             </a:r>
             <a:endParaRPr lang="en-US" sz="1900" b="0" u="none" strike="noStrike">
               <a:solidFill>
@@ -24808,17 +24945,6 @@
                 <a:tab pos="0" algn="l"/>
               </a:tabLst>
             </a:pPr>
-            <a:r>
-              <a:rPr lang="en-US" sz="2300" b="1" u="none" strike="noStrike">
-                <a:solidFill>
-                  <a:srgbClr val="17365D"/>
-                </a:solidFill>
-                <a:effectLst/>
-                <a:uFillTx/>
-                <a:latin typeface="Aptos"/>
-              </a:rPr>
-              <a:t>$$N\text{ odd},\qquad h[n]=h[M-n]$$</a:t>
-            </a:r>
             <a:endParaRPr lang="en-US" sz="2300" b="0" u="none" strike="noStrike">
               <a:solidFill>
                 <a:srgbClr val="000000"/>
@@ -24886,7 +25012,7 @@
                 <a:uFillTx/>
                 <a:latin typeface="Aptos"/>
               </a:rPr>
-              <a:t>Group delay is integer: $M/2=(N-1)/2$.</a:t>
+              <a:t>Group delay is integer: M/2=(N-1)/2.</a:t>
             </a:r>
             <a:endParaRPr lang="en-US" sz="1800" b="0" u="none" strike="noStrike">
               <a:solidFill>
@@ -24917,7 +25043,7 @@
                 <a:uFillTx/>
                 <a:latin typeface="Aptos"/>
               </a:rPr>
-              <a:t>No zero at $z=1$ or $z=-1$ is forced by symmetry alone.</a:t>
+              <a:t>No zero at z=1 or z=-1 is forced by symmetry alone.</a:t>
             </a:r>
             <a:endParaRPr lang="en-US" sz="1800" b="0" u="none" strike="noStrike">
               <a:solidFill>
@@ -24961,6 +25087,30 @@
           </a:p>
         </p:txBody>
       </p:sp>
+      <p:pic>
+        <p:nvPicPr>
+          <p:cNvPr id="81" name="Picture 80" descr="eq_06.png"/>
+          <p:cNvPicPr>
+            <a:picLocks noChangeAspect="1"/>
+          </p:cNvPicPr>
+          <p:nvPr/>
+        </p:nvPicPr>
+        <p:blipFill>
+          <a:blip r:embed="rId3"/>
+          <a:stretch>
+            <a:fillRect/>
+          </a:stretch>
+        </p:blipFill>
+        <p:spPr>
+          <a:xfrm>
+            <a:off x="2213647" y="1459339"/>
+            <a:ext cx="7642426" cy="555681"/>
+          </a:xfrm>
+          <a:prstGeom prst="rect">
+            <a:avLst/>
+          </a:prstGeom>
+        </p:spPr>
+      </p:pic>
     </p:spTree>
   </p:cSld>
   <p:clrMapOvr>
